--- a/cursos/recursos/el-mapa-de-los-finales/16-alfiles-de-distinto-color-ii.pptx
+++ b/cursos/recursos/el-mapa-de-los-finales/16-alfiles-de-distinto-color-ii.pptx
@@ -4915,7 +4915,7 @@
                 </a:solidFill>
                 <a:latin typeface="Calibri"/>
               </a:rPr>
-              <a:t>Contá columnas de separación en cada posición y compará el resultado con el motor.</a:t>
+              <a:t>Cuenta columnas de separación en cada posición y compará el resultado con el motor.</a:t>
             </a:r>
           </a:p>
           <a:p>
@@ -4986,7 +4986,7 @@
                 </a:solidFill>
                 <a:latin typeface="Calibri"/>
               </a:rPr>
-              <a:t>•  Recorré cada línea principal hasta entender el porqué de cada jugada.</a:t>
+              <a:t>•  Recorre cada línea principal hasta entender el porqué de cada jugada.</a:t>
             </a:r>
           </a:p>
           <a:p>
@@ -5002,7 +5002,7 @@
                 </a:solidFill>
                 <a:latin typeface="Calibri"/>
               </a:rPr>
-              <a:t>•  Practicá primero las posiciones clave, después las demás.</a:t>
+              <a:t>•  Practica primero las posiciones clave, después las demás.</a:t>
             </a:r>
           </a:p>
           <a:p>
@@ -5018,7 +5018,7 @@
                 </a:solidFill>
                 <a:latin typeface="Calibri"/>
               </a:rPr>
-              <a:t>•  Anotá las reglas de cada final con tus palabras.</a:t>
+              <a:t>•  Anota las reglas de cada final con tus palabras.</a:t>
             </a:r>
           </a:p>
         </p:txBody>
